--- a/Thesis_Defense_24MSE23204.pptx
+++ b/Thesis_Defense_24MSE23204.pptx
@@ -4942,7 +4942,7 @@
         </p:spPr>
         <p:txBody>
           <a:bodyPr wrap="square" lIns="0" rIns="0" tIns="0" bIns="0">
-            <a:spAutoFit/>
+            <a:normAutofit/>
           </a:bodyPr>
           <a:lstStyle/>
           <a:p>
@@ -4961,7 +4961,7 @@
                 </a:solidFill>
                 <a:latin typeface="Calibri"/>
               </a:rPr>
-              <a:t>•  Naive training (always shipping the last epoch) let a 458-sample medical import measurably worsen recognition: 62.8% WER vs the untrained model’s own 32.0% on the same held-out audio.</a:t>
+              <a:t>•  Naive shipping of the last epoch measurably worsened recognition: 62.8% WER vs base’s own 32.0% on the same held-out audio.</a:t>
             </a:r>
           </a:p>
           <a:p>
@@ -4980,7 +4980,7 @@
                 </a:solidFill>
                 <a:latin typeface="Calibri"/>
               </a:rPr>
-              <a:t>•  First fix (score a held-out split, reject unless it beats the base model) was itself fooled: the same split picked the best epoch and judged accept/reject, so an adapter it accepted as “+9–15pp better” still lost by 20–27pp on a genuinely independent 30-file eval set, twice.</a:t>
+              <a:t>•  The held-out gate was itself fooled: adapters accepted as “9–15pp better” internally still lost 20–27pp on an independent eval set, twice.</a:t>
             </a:r>
           </a:p>
           <a:p>
@@ -4999,7 +4999,7 @@
                 </a:solidFill>
                 <a:latin typeface="Calibri"/>
               </a:rPr>
-              <a:t>•  Root cause: any split carved from one guest’s own upload batch shares that batch’s recording session/speaker/domain characteristics, regardless of split ratio or size (confirmed from 13% to 25% held-out, up to 60 samples).</a:t>
+              <a:t>•  Cause: any split from one guest’s own upload shares that batch’s recording/speaker/domain traits, regardless of split size.</a:t>
             </a:r>
           </a:p>
         </p:txBody>
@@ -5061,7 +5061,7 @@
         </p:spPr>
         <p:txBody>
           <a:bodyPr wrap="square" lIns="0" rIns="0" tIns="0" bIns="0">
-            <a:spAutoFit/>
+            <a:normAutofit/>
           </a:bodyPr>
           <a:lstStyle/>
           <a:p>
@@ -5080,7 +5080,7 @@
                 </a:solidFill>
                 <a:latin typeface="Calibri"/>
               </a:rPr>
-              <a:t>•  Gate 0/Gate 1: split the held-out portion in two — an early-stopping set (never used for accept/reject) and a final-gate set (never used to pick the epoch) — removes the double-dipping bias.</a:t>
+              <a:t>•  Gate 0/1: separate early-stopping and final-gate splits remove the double-dipping bias (one split picking the epoch AND judging accept/reject).</a:t>
             </a:r>
           </a:p>
           <a:p>
@@ -5099,7 +5099,7 @@
                 </a:solidFill>
                 <a:latin typeface="Calibri"/>
               </a:rPr>
-              <a:t>•  Gate 2: score every adapter against a fixed 500-clip general-Vietnamese benchmark (doof-ferb/vlsp2020_vinai_100h) no guest’s upload ever touches — catches regressions Gate 1 structurally cannot see.</a:t>
+              <a:t>•  Gate 2: score every adapter against a fixed 500-clip general-Vietnamese benchmark no guest’s data ever touches.</a:t>
             </a:r>
           </a:p>
           <a:p>
@@ -5118,7 +5118,7 @@
                 </a:solidFill>
                 <a:latin typeface="Calibri"/>
               </a:rPr>
-              <a:t>•  Validated on a real case: a 60-sample medical adapter cleared Gate 1 (52.0% vs 60.2% base on its own domain) but was correctly rejected by Gate 2 (47.6% vs 44.4% base on general Vietnamese).</a:t>
+              <a:t>•  Real case: a 60-sample adapter cleared Gate 1 (52.0% vs 60.2% base) but was rejected by Gate 2 (47.6% vs 44.4% base).</a:t>
             </a:r>
           </a:p>
           <a:p>
@@ -5137,7 +5137,7 @@
                 </a:solidFill>
                 <a:latin typeface="Calibri"/>
               </a:rPr>
-              <a:t>•  Across every configuration tested so far (60–250 samples, LoRA rank 8–16), no Tier 2 adapter has yet beaten the base model on genuinely independent domain data — the three-gate pipeline guarantees none of them ship regardless.</a:t>
+              <a:t>•  No adapter has yet beaten base on independent data — the pipeline still guarantees none ship regardless.</a:t>
             </a:r>
           </a:p>
         </p:txBody>
@@ -5204,7 +5204,7 @@
         </p:spPr>
         <p:txBody>
           <a:bodyPr wrap="square" anchor="t" lIns="0" rIns="0" tIns="0" bIns="0">
-            <a:spAutoFit/>
+            <a:normAutofit/>
           </a:bodyPr>
           <a:lstStyle/>
           <a:p>
@@ -5220,7 +5220,7 @@
                 </a:solidFill>
                 <a:latin typeface="Calibri"/>
               </a:rPr>
-              <a:t>The finding reframes Tier 2’s contribution: not yet a proven quality improvement over base Whisper, but a self-serve fine-tuning pipeline that is provably safe to expose publicly — it never ships a regression, even when the underlying adapter doesn’t help.</a:t>
+              <a:t>Not yet a proven quality improvement over base Whisper — but a self-serve fine-tuning pipeline that is provably safe to expose publicly, since it never ships a regression.</a:t>
             </a:r>
           </a:p>
         </p:txBody>

--- a/Thesis_Defense_24MSE23204.pptx
+++ b/Thesis_Defense_24MSE23204.pptx
@@ -4322,7 +4322,7 @@
                 </a:solidFill>
                 <a:latin typeface="Calibri"/>
               </a:rPr>
-              <a:t>Post-submission update — voice reliability &amp; live transcription</a:t>
+              <a:t>Continued implementation — voice reliability &amp; live transcription</a:t>
             </a:r>
           </a:p>
         </p:txBody>
@@ -4446,6 +4446,101 @@
             </a:r>
           </a:p>
           <a:p>
+            <a:r>
+              <a:rPr sz="1550">
+                <a:solidFill>
+                  <a:srgbClr val="212121"/>
+                </a:solidFill>
+                <a:latin typeface="Calibri"/>
+              </a:rPr>
+              <a:t>•  Added GET /voice/status (VoiceStationClient.is_available()) so the UI can tell “no voices yet” from “service is down”.</a:t>
+            </a:r>
+          </a:p>
+          <a:p>
+            <a:r>
+              <a:rPr sz="1550">
+                <a:solidFill>
+                  <a:srgbClr val="212121"/>
+                </a:solidFill>
+                <a:latin typeface="Calibri"/>
+              </a:rPr>
+              <a:t>•  Added start_all.bat to launch clone-voice-station then rag-legal-assistant together, health-checked.</a:t>
+            </a:r>
+          </a:p>
+          <a:p>
+            <a:r>
+              <a:rPr sz="1550">
+                <a:solidFill>
+                  <a:srgbClr val="212121"/>
+                </a:solidFill>
+                <a:latin typeface="Calibri"/>
+              </a:rPr>
+              <a:t>•  2026-08-12: found and fixed a session-identity leak — manager and STT Lab guest login shared one cookie, so a manager could silently resolve as a guest whose account they'd also logged into in the same browser.</a:t>
+            </a:r>
+          </a:p>
+        </p:txBody>
+      </p:sp>
+      <p:sp>
+        <p:nvSpPr>
+          <p:cNvPr id="8" name="TextBox 7"/>
+          <p:cNvSpPr txBox="1"/>
+          <p:nvPr/>
+        </p:nvSpPr>
+        <p:spPr>
+          <a:xfrm>
+            <a:off x="6309360" y="1371600"/>
+            <a:ext cx="5120640" cy="365760"/>
+          </a:xfrm>
+          <a:prstGeom prst="rect">
+            <a:avLst/>
+          </a:prstGeom>
+          <a:noFill/>
+        </p:spPr>
+        <p:txBody>
+          <a:bodyPr wrap="square" anchor="t" lIns="0" rIns="0" tIns="0" bIns="0">
+            <a:spAutoFit/>
+          </a:bodyPr>
+          <a:lstStyle/>
+          <a:p>
+            <a:pPr algn="l">
+              <a:lnSpc>
+                <a:spcPct val="100000"/>
+              </a:lnSpc>
+            </a:pPr>
+            <a:r>
+              <a:rPr sz="1700" b="1" i="0">
+                <a:solidFill>
+                  <a:srgbClr val="CA6F1E"/>
+                </a:solidFill>
+                <a:latin typeface="Calibri"/>
+              </a:rPr>
+              <a:t>Live speech-to-text</a:t>
+            </a:r>
+          </a:p>
+        </p:txBody>
+      </p:sp>
+      <p:sp>
+        <p:nvSpPr>
+          <p:cNvPr id="9" name="TextBox 8"/>
+          <p:cNvSpPr txBox="1"/>
+          <p:nvPr/>
+        </p:nvSpPr>
+        <p:spPr>
+          <a:xfrm>
+            <a:off x="6309360" y="1783080"/>
+            <a:ext cx="5394960" cy="2377440"/>
+          </a:xfrm>
+          <a:prstGeom prst="rect">
+            <a:avLst/>
+          </a:prstGeom>
+          <a:noFill/>
+        </p:spPr>
+        <p:txBody>
+          <a:bodyPr wrap="square" lIns="0" rIns="0" tIns="0" bIns="0">
+            <a:spAutoFit/>
+          </a:bodyPr>
+          <a:lstStyle/>
+          <a:p>
             <a:pPr>
               <a:lnSpc>
                 <a:spcPct val="105000"/>
@@ -4461,18 +4556,10 @@
                 </a:solidFill>
                 <a:latin typeface="Calibri"/>
               </a:rPr>
-              <a:t>•  Added GET /voice/status (VoiceStationClient.is_available()) so the UI can tell “no voices yet” from “service is down”.</a:t>
-            </a:r>
-          </a:p>
-          <a:p>
-            <a:pPr>
-              <a:lnSpc>
-                <a:spcPct val="105000"/>
-              </a:lnSpc>
-              <a:spcAft>
-                <a:spcPts val="1000"/>
-              </a:spcAft>
-            </a:pPr>
+              <a:t>•  MediaRecorder now captures audio in 500 ms chunks instead of one shot.</a:t>
+            </a:r>
+          </a:p>
+          <a:p>
             <a:r>
               <a:rPr sz="1550">
                 <a:solidFill>
@@ -4480,80 +4567,10 @@
                 </a:solidFill>
                 <a:latin typeface="Calibri"/>
               </a:rPr>
-              <a:t>•  Added start_all.bat to launch clone-voice-station then rag-legal-assistant together, health-checked.</a:t>
-            </a:r>
-          </a:p>
-        </p:txBody>
-      </p:sp>
-      <p:sp>
-        <p:nvSpPr>
-          <p:cNvPr id="8" name="TextBox 7"/>
-          <p:cNvSpPr txBox="1"/>
-          <p:nvPr/>
-        </p:nvSpPr>
-        <p:spPr>
-          <a:xfrm>
-            <a:off x="6309360" y="1371600"/>
-            <a:ext cx="5120640" cy="365760"/>
-          </a:xfrm>
-          <a:prstGeom prst="rect">
-            <a:avLst/>
-          </a:prstGeom>
-          <a:noFill/>
-        </p:spPr>
-        <p:txBody>
-          <a:bodyPr wrap="square" anchor="t" lIns="0" rIns="0" tIns="0" bIns="0">
-            <a:spAutoFit/>
-          </a:bodyPr>
-          <a:lstStyle/>
-          <a:p>
-            <a:pPr algn="l">
-              <a:lnSpc>
-                <a:spcPct val="100000"/>
-              </a:lnSpc>
-            </a:pPr>
-            <a:r>
-              <a:rPr sz="1700" b="1" i="0">
-                <a:solidFill>
-                  <a:srgbClr val="CA6F1E"/>
-                </a:solidFill>
-                <a:latin typeface="Calibri"/>
-              </a:rPr>
-              <a:t>Live speech-to-text</a:t>
-            </a:r>
-          </a:p>
-        </p:txBody>
-      </p:sp>
-      <p:sp>
-        <p:nvSpPr>
-          <p:cNvPr id="9" name="TextBox 8"/>
-          <p:cNvSpPr txBox="1"/>
-          <p:nvPr/>
-        </p:nvSpPr>
-        <p:spPr>
-          <a:xfrm>
-            <a:off x="6309360" y="1783080"/>
-            <a:ext cx="5394960" cy="2377440"/>
-          </a:xfrm>
-          <a:prstGeom prst="rect">
-            <a:avLst/>
-          </a:prstGeom>
-          <a:noFill/>
-        </p:spPr>
-        <p:txBody>
-          <a:bodyPr wrap="square" lIns="0" rIns="0" tIns="0" bIns="0">
-            <a:spAutoFit/>
-          </a:bodyPr>
-          <a:lstStyle/>
-          <a:p>
-            <a:pPr>
-              <a:lnSpc>
-                <a:spcPct val="105000"/>
-              </a:lnSpc>
-              <a:spcAft>
-                <a:spcPts val="1000"/>
-              </a:spcAft>
-            </a:pPr>
+              <a:t>•  Live tick cadence is now local/remote-aware, not a flat 2.5 s: 1 s while running Whisper in-process (local), 2 s when calling clone-voice-station remotely — decided fresh via /voice/status at the start of every recording.</a:t>
+            </a:r>
+          </a:p>
+          <a:p>
             <a:r>
               <a:rPr sz="1550">
                 <a:solidFill>
@@ -4561,18 +4578,10 @@
                 </a:solidFill>
                 <a:latin typeface="Calibri"/>
               </a:rPr>
-              <a:t>•  MediaRecorder now captures audio in 500 ms chunks instead of one shot.</a:t>
-            </a:r>
-          </a:p>
-          <a:p>
-            <a:pPr>
-              <a:lnSpc>
-                <a:spcPct val="105000"/>
-              </a:lnSpc>
-              <a:spcAft>
-                <a:spcPts val="1000"/>
-              </a:spcAft>
-            </a:pPr>
+              <a:t>•  2026-08-12: admin can upload a .stt-pack.zip from STT Lab and toggle transcription to run locally in rag-legal-assistant itself — verified end to end with zero requests reaching clone-voice-station.</a:t>
+            </a:r>
+          </a:p>
+          <a:p>
             <a:r>
               <a:rPr sz="1550">
                 <a:solidFill>
@@ -4580,45 +4589,7 @@
                 </a:solidFill>
                 <a:latin typeface="Calibri"/>
               </a:rPr>
-              <a:t>•  Every 2.5 s the growing recording is re-sent to /voice/transcribe.</a:t>
-            </a:r>
-          </a:p>
-          <a:p>
-            <a:pPr>
-              <a:lnSpc>
-                <a:spcPct val="105000"/>
-              </a:lnSpc>
-              <a:spcAft>
-                <a:spcPts val="1000"/>
-              </a:spcAft>
-            </a:pPr>
-            <a:r>
-              <a:rPr sz="1550">
-                <a:solidFill>
-                  <a:srgbClr val="212121"/>
-                </a:solidFill>
-                <a:latin typeface="Calibri"/>
-              </a:rPr>
-              <a:t>•  Chat input updates live while the user keeps speaking; the user's own edits are never overwritten.</a:t>
-            </a:r>
-          </a:p>
-          <a:p>
-            <a:pPr>
-              <a:lnSpc>
-                <a:spcPct val="105000"/>
-              </a:lnSpc>
-              <a:spcAft>
-                <a:spcPts val="1000"/>
-              </a:spcAft>
-            </a:pPr>
-            <a:r>
-              <a:rPr sz="1550">
-                <a:solidFill>
-                  <a:srgbClr val="212121"/>
-                </a:solidFill>
-                <a:latin typeface="Calibri"/>
-              </a:rPr>
-              <a:t>•  Final authoritative transcription still runs when the user clicks stop.</a:t>
+              <a:t>•  Same local/remote-aware live-transcribe brought to voice-lab-example's main chat demo the same day, closing the gap with its own /compare page.</a:t>
             </a:r>
           </a:p>
         </p:txBody>
@@ -6969,6 +6940,123 @@
             </a:r>
           </a:p>
           <a:p>
+            <a:r>
+              <a:rPr sz="1400">
+                <a:solidFill>
+                  <a:srgbClr val="212121"/>
+                </a:solidFill>
+                <a:latin typeface="Calibri"/>
+              </a:rPr>
+              <a:t>•  clone-voice-client: installable Python SDK.</a:t>
+            </a:r>
+          </a:p>
+          <a:p>
+            <a:r>
+              <a:rPr sz="1400">
+                <a:solidFill>
+                  <a:srgbClr val="212121"/>
+                </a:solidFill>
+                <a:latin typeface="Calibri"/>
+              </a:rPr>
+              <a:t>•  rag-legal-assistant: mic input + cloned-voice read-aloud, via the SDK.</a:t>
+            </a:r>
+          </a:p>
+          <a:p>
+            <a:r>
+              <a:rPr sz="1400">
+                <a:solidFill>
+                  <a:srgbClr val="212121"/>
+                </a:solidFill>
+                <a:latin typeface="Calibri"/>
+              </a:rPr>
+              <a:t>•  Colab notebook: trains &amp; serves RVC v2 + PhoWhisper end-to-end over HTTPS.</a:t>
+            </a:r>
+          </a:p>
+          <a:p>
+            <a:r>
+              <a:rPr sz="1400">
+                <a:solidFill>
+                  <a:srgbClr val="212121"/>
+                </a:solidFill>
+                <a:latin typeface="Calibri"/>
+              </a:rPr>
+              <a:t>•  AI-disclosure watermarking + biometric-consent flow (Section 6).</a:t>
+            </a:r>
+          </a:p>
+          <a:p>
+            <a:r>
+              <a:rPr sz="1400">
+                <a:solidFill>
+                  <a:srgbClr val="212121"/>
+                </a:solidFill>
+                <a:latin typeface="Calibri"/>
+              </a:rPr>
+              <a:t>•  2 trained RVC voice models: “TestGiong1” (male, 2026-08-05) + “GiọngNữ” (female, 2026-08-12) — both live, callable via /api/speak.</a:t>
+            </a:r>
+          </a:p>
+        </p:txBody>
+      </p:sp>
+      <p:sp>
+        <p:nvSpPr>
+          <p:cNvPr id="8" name="TextBox 7"/>
+          <p:cNvSpPr txBox="1"/>
+          <p:nvPr/>
+        </p:nvSpPr>
+        <p:spPr>
+          <a:xfrm>
+            <a:off x="6309360" y="1371600"/>
+            <a:ext cx="5303520" cy="365760"/>
+          </a:xfrm>
+          <a:prstGeom prst="rect">
+            <a:avLst/>
+          </a:prstGeom>
+          <a:noFill/>
+        </p:spPr>
+        <p:txBody>
+          <a:bodyPr wrap="square" anchor="t" lIns="0" rIns="0" tIns="0" bIns="0">
+            <a:spAutoFit/>
+          </a:bodyPr>
+          <a:lstStyle/>
+          <a:p>
+            <a:pPr algn="l">
+              <a:lnSpc>
+                <a:spcPct val="100000"/>
+              </a:lnSpc>
+            </a:pPr>
+            <a:r>
+              <a:rPr sz="1700" b="1" i="0">
+                <a:solidFill>
+                  <a:srgbClr val="CA6F1E"/>
+                </a:solidFill>
+                <a:latin typeface="Calibri"/>
+              </a:rPr>
+              <a:t>Remaining</a:t>
+            </a:r>
+          </a:p>
+        </p:txBody>
+      </p:sp>
+      <p:sp>
+        <p:nvSpPr>
+          <p:cNvPr id="9" name="TextBox 8"/>
+          <p:cNvSpPr txBox="1"/>
+          <p:nvPr/>
+        </p:nvSpPr>
+        <p:spPr>
+          <a:xfrm>
+            <a:off x="6309360" y="1783080"/>
+            <a:ext cx="5394960" cy="4206240"/>
+          </a:xfrm>
+          <a:prstGeom prst="rect">
+            <a:avLst/>
+          </a:prstGeom>
+          <a:noFill/>
+        </p:spPr>
+        <p:txBody>
+          <a:bodyPr wrap="square" lIns="0" rIns="0" tIns="0" bIns="0">
+            <a:spAutoFit/>
+          </a:bodyPr>
+          <a:lstStyle/>
+          <a:p>
             <a:pPr>
               <a:lnSpc>
                 <a:spcPct val="105000"/>
@@ -6984,175 +7072,10 @@
                 </a:solidFill>
                 <a:latin typeface="Calibri"/>
               </a:rPr>
-              <a:t>•  clone-voice-client: installable Python SDK.</a:t>
-            </a:r>
-          </a:p>
-          <a:p>
-            <a:pPr>
-              <a:lnSpc>
-                <a:spcPct val="105000"/>
-              </a:lnSpc>
-              <a:spcAft>
-                <a:spcPts val="1000"/>
-              </a:spcAft>
-            </a:pPr>
-            <a:r>
-              <a:rPr sz="1400">
-                <a:solidFill>
-                  <a:srgbClr val="212121"/>
-                </a:solidFill>
-                <a:latin typeface="Calibri"/>
-              </a:rPr>
-              <a:t>•  rag-legal-assistant: mic input + cloned-voice read-aloud, via the SDK.</a:t>
-            </a:r>
-          </a:p>
-          <a:p>
-            <a:pPr>
-              <a:lnSpc>
-                <a:spcPct val="105000"/>
-              </a:lnSpc>
-              <a:spcAft>
-                <a:spcPts val="1000"/>
-              </a:spcAft>
-            </a:pPr>
-            <a:r>
-              <a:rPr sz="1400">
-                <a:solidFill>
-                  <a:srgbClr val="212121"/>
-                </a:solidFill>
-                <a:latin typeface="Calibri"/>
-              </a:rPr>
-              <a:t>•  Colab notebook: trains &amp; serves RVC v2 + PhoWhisper end-to-end over HTTPS.</a:t>
-            </a:r>
-          </a:p>
-          <a:p>
-            <a:pPr>
-              <a:lnSpc>
-                <a:spcPct val="105000"/>
-              </a:lnSpc>
-              <a:spcAft>
-                <a:spcPts val="1000"/>
-              </a:spcAft>
-            </a:pPr>
-            <a:r>
-              <a:rPr sz="1400">
-                <a:solidFill>
-                  <a:srgbClr val="212121"/>
-                </a:solidFill>
-                <a:latin typeface="Calibri"/>
-              </a:rPr>
-              <a:t>•  AI-disclosure watermarking + biometric-consent flow (Section 6).</a:t>
-            </a:r>
-          </a:p>
-        </p:txBody>
-      </p:sp>
-      <p:sp>
-        <p:nvSpPr>
-          <p:cNvPr id="8" name="TextBox 7"/>
-          <p:cNvSpPr txBox="1"/>
-          <p:nvPr/>
-        </p:nvSpPr>
-        <p:spPr>
-          <a:xfrm>
-            <a:off x="6309360" y="1371600"/>
-            <a:ext cx="5303520" cy="365760"/>
-          </a:xfrm>
-          <a:prstGeom prst="rect">
-            <a:avLst/>
-          </a:prstGeom>
-          <a:noFill/>
-        </p:spPr>
-        <p:txBody>
-          <a:bodyPr wrap="square" anchor="t" lIns="0" rIns="0" tIns="0" bIns="0">
-            <a:spAutoFit/>
-          </a:bodyPr>
-          <a:lstStyle/>
-          <a:p>
-            <a:pPr algn="l">
-              <a:lnSpc>
-                <a:spcPct val="100000"/>
-              </a:lnSpc>
-            </a:pPr>
-            <a:r>
-              <a:rPr sz="1700" b="1" i="0">
-                <a:solidFill>
-                  <a:srgbClr val="CA6F1E"/>
-                </a:solidFill>
-                <a:latin typeface="Calibri"/>
-              </a:rPr>
-              <a:t>Remaining</a:t>
-            </a:r>
-          </a:p>
-        </p:txBody>
-      </p:sp>
-      <p:sp>
-        <p:nvSpPr>
-          <p:cNvPr id="9" name="TextBox 8"/>
-          <p:cNvSpPr txBox="1"/>
-          <p:nvPr/>
-        </p:nvSpPr>
-        <p:spPr>
-          <a:xfrm>
-            <a:off x="6309360" y="1783080"/>
-            <a:ext cx="5394960" cy="4206240"/>
-          </a:xfrm>
-          <a:prstGeom prst="rect">
-            <a:avLst/>
-          </a:prstGeom>
-          <a:noFill/>
-        </p:spPr>
-        <p:txBody>
-          <a:bodyPr wrap="square" lIns="0" rIns="0" tIns="0" bIns="0">
-            <a:spAutoFit/>
-          </a:bodyPr>
-          <a:lstStyle/>
-          <a:p>
-            <a:pPr>
-              <a:lnSpc>
-                <a:spcPct val="105000"/>
-              </a:lnSpc>
-              <a:spcAft>
-                <a:spcPts val="1000"/>
-              </a:spcAft>
-            </a:pPr>
-            <a:r>
-              <a:rPr sz="1400">
-                <a:solidFill>
-                  <a:srgbClr val="212121"/>
-                </a:solidFill>
-                <a:latin typeface="Calibri"/>
-              </a:rPr>
-              <a:t>•  At least 2 trained RVC voice models (1 female, 1 male speaker).</a:t>
-            </a:r>
-          </a:p>
-          <a:p>
-            <a:pPr>
-              <a:lnSpc>
-                <a:spcPct val="105000"/>
-              </a:lnSpc>
-              <a:spcAft>
-                <a:spcPts val="1000"/>
-              </a:spcAft>
-            </a:pPr>
-            <a:r>
-              <a:rPr sz="1400">
-                <a:solidFill>
-                  <a:srgbClr val="212121"/>
-                </a:solidFill>
-                <a:latin typeface="Calibri"/>
-              </a:rPr>
               <a:t>•  Quantitative evaluation report: WER, latency, SNR, MOS vs. F5-TTS baseline.</a:t>
             </a:r>
           </a:p>
           <a:p>
-            <a:pPr>
-              <a:lnSpc>
-                <a:spcPct val="105000"/>
-              </a:lnSpc>
-              <a:spcAft>
-                <a:spcPts val="1000"/>
-              </a:spcAft>
-            </a:pPr>
             <a:r>
               <a:rPr sz="1400">
                 <a:solidFill>

--- a/Thesis_Defense_24MSE23204.pptx
+++ b/Thesis_Defense_24MSE23204.pptx
@@ -5009,7 +5009,7 @@
                 </a:solidFill>
                 <a:latin typeface="Calibri"/>
               </a:rPr>
-              <a:t>Three-gate fix</a:t>
+              <a:t>Current gate design</a:t>
             </a:r>
           </a:p>
         </p:txBody>
@@ -5070,7 +5070,7 @@
                 </a:solidFill>
                 <a:latin typeface="Calibri"/>
               </a:rPr>
-              <a:t>•  Gate 2: score every adapter against a fixed 500-clip general-Vietnamese benchmark no guest’s data ever touches.</a:t>
+              <a:t>•  A fixed 500-clip general-Vietnamese benchmark was tried as Gate 2 — dropped after 5 runs cleared none of it; it tests general capability, not domain adaptation.</a:t>
             </a:r>
           </a:p>
           <a:p>
@@ -5089,7 +5089,7 @@
                 </a:solidFill>
                 <a:latin typeface="Calibri"/>
               </a:rPr>
-              <a:t>•  Real case: a 60-sample adapter cleared Gate 1 (52.0% vs 60.2% base) but was rejected by Gate 2 (47.6% vs 44.4% base).</a:t>
+              <a:t>•  Replaced by an independent holdout split (e.g. a dataset's own official test partition) serving as the final gate directly — no unrelated benchmark stacked on top.</a:t>
             </a:r>
           </a:p>
           <a:p>
@@ -5108,7 +5108,7 @@
                 </a:solidFill>
                 <a:latin typeface="Calibri"/>
               </a:rPr>
-              <a:t>•  No adapter has yet beaten base on independent data — the pipeline still guarantees none ship regardless.</a:t>
+              <a:t>•  First pass under the new gate: 400-sample whisper-tiny adapter, 47.0% WER vs. 61.7% base on the held-out split — shipped.</a:t>
             </a:r>
           </a:p>
         </p:txBody>
@@ -5191,7 +5191,7 @@
                 </a:solidFill>
                 <a:latin typeface="Calibri"/>
               </a:rPr>
-              <a:t>Not yet a proven quality improvement over base Whisper — but a self-serve fine-tuning pipeline that is provably safe to expose publicly, since it never ships a regression.</a:t>
+              <a:t>Provably safe to expose publicly — never ships a regression — and now has shipped its first genuine win over base Whisper: 47.0% vs. 61.7% WER on an independent split.</a:t>
             </a:r>
           </a:p>
         </p:txBody>
@@ -5851,7 +5851,7 @@
                 </a:solidFill>
                 <a:latin typeface="Calibri"/>
               </a:rPr>
-              <a:t>7. EVALUATION PLAN</a:t>
+              <a:t>7. EVALUATION METHODOLOGY &amp; PRELIMINARY RESULTS</a:t>
             </a:r>
           </a:p>
         </p:txBody>
@@ -5890,7 +5890,7 @@
                 </a:solidFill>
                 <a:latin typeface="Calibri"/>
               </a:rPr>
-              <a:t>Objective + subjective metrics per pipeline layer</a:t>
+              <a:t>Metrics, thresholds, and a first pilot pass</a:t>
             </a:r>
           </a:p>
         </p:txBody>
@@ -6640,7 +6640,7 @@
         <p:spPr>
           <a:xfrm>
             <a:off x="502920" y="4937760"/>
-            <a:ext cx="11155680" cy="1463040"/>
+            <a:ext cx="5394960" cy="1463040"/>
           </a:xfrm>
           <a:prstGeom prst="rect">
             <a:avLst/>
@@ -6669,6 +6669,86 @@
                 <a:latin typeface="Calibri"/>
               </a:rPr>
               <a:t>•  RQ3 latency techniques: model-size selection • Colab GPU offload • streaming TTS+RVC • spoken-answer truncation.</a:t>
+            </a:r>
+          </a:p>
+        </p:txBody>
+      </p:sp>
+      <p:sp>
+        <p:nvSpPr>
+          <p:cNvPr id="9" name="TextBox 9"/>
+          <p:cNvSpPr txBox="1"/>
+          <p:nvPr/>
+        </p:nvSpPr>
+        <p:spPr>
+          <a:xfrm>
+            <a:off x="6309360" y="4937760"/>
+            <a:ext cx="5394960" cy="1463040"/>
+          </a:xfrm>
+          <a:prstGeom prst="rect">
+            <a:avLst/>
+          </a:prstGeom>
+          <a:noFill/>
+        </p:spPr>
+        <p:txBody>
+          <a:bodyPr wrap="square" lIns="0" rIns="0" tIns="0" bIns="0">
+            <a:spAutoFit/>
+          </a:bodyPr>
+          <a:lstStyle/>
+          <a:p>
+            <a:pPr>
+              <a:lnSpc>
+                <a:spcPct val="105000"/>
+              </a:lnSpc>
+              <a:spcAft>
+                <a:spcPts val="800"/>
+              </a:spcAft>
+            </a:pPr>
+            <a:r>
+              <a:rPr sz="1450">
+                <a:solidFill>
+                  <a:srgbClr val="212121"/>
+                </a:solidFill>
+                <a:latin typeface="Calibri"/>
+              </a:rPr>
+              <a:t>•  ASR pilot: PhoWhisper-large (Colab) 11.7% WER vs. local PhoWhisper-small fallback's 21.2%, on one held-out utterance.</a:t>
+            </a:r>
+          </a:p>
+          <a:p>
+            <a:pPr>
+              <a:lnSpc>
+                <a:spcPct val="105000"/>
+              </a:lnSpc>
+              <a:spcAft>
+                <a:spcPts val="800"/>
+              </a:spcAft>
+            </a:pPr>
+            <a:r>
+              <a:rPr sz="1450">
+                <a:solidFill>
+                  <a:srgbClr val="212121"/>
+                </a:solidFill>
+                <a:latin typeface="Calibri"/>
+              </a:rPr>
+              <a:t>•  Latency pilot: 18.7s remote / 8.4s local — both above the ≤4s target; motivates the GPU-offload technique above.</a:t>
+            </a:r>
+          </a:p>
+          <a:p>
+            <a:pPr>
+              <a:lnSpc>
+                <a:spcPct val="105000"/>
+              </a:lnSpc>
+              <a:spcAft>
+                <a:spcPts val="800"/>
+              </a:spcAft>
+            </a:pPr>
+            <a:r>
+              <a:rPr sz="1450">
+                <a:solidFill>
+                  <a:srgbClr val="212121"/>
+                </a:solidFill>
+                <a:latin typeface="Calibri"/>
+              </a:rPr>
+              <a:t>•  RVC pilot: full train-and-convert pass completed end-to-end on Colab T4 in 44 min; verified live via /api/speak.</a:t>
             </a:r>
           </a:p>
         </p:txBody>
@@ -6777,7 +6857,7 @@
                 </a:solidFill>
                 <a:latin typeface="Calibri"/>
               </a:rPr>
-              <a:t>8. EXPECTED RESULTS &amp; DELIVERABLES</a:t>
+              <a:t>8. RESULTS &amp; DELIVERABLES</a:t>
             </a:r>
           </a:p>
         </p:txBody>
@@ -6992,6 +7072,28 @@
                 <a:latin typeface="Calibri"/>
               </a:rPr>
               <a:t>•  2 trained RVC voice models: “TestGiong1” (male, 2026-08-05) + “GiọngNữ” (female, 2026-08-12) — both live, callable via /api/speak.</a:t>
+            </a:r>
+          </a:p>
+          <a:p>
+            <a:r>
+              <a:rPr sz="1400">
+                <a:solidFill>
+                  <a:srgbClr val="212121"/>
+                </a:solidFill>
+                <a:latin typeface="Calibri"/>
+              </a:rPr>
+              <a:t>•  STT Lab: guest self-serve adapter publish/default + PhoWhisper-small as a Tier 2 base-model option (2026-08-12).</a:t>
+            </a:r>
+          </a:p>
+          <a:p>
+            <a:r>
+              <a:rPr sz="1400">
+                <a:solidFill>
+                  <a:srgbClr val="212121"/>
+                </a:solidFill>
+                <a:latin typeface="Calibri"/>
+              </a:rPr>
+              <a:t>•  Orphaned-training auto-recovery on server startup — fixed after a real host power-loss interruption.</a:t>
             </a:r>
           </a:p>
         </p:txBody>
@@ -7673,7 +7775,7 @@
                 </a:solidFill>
                 <a:latin typeface="Calibri"/>
               </a:rPr>
-              <a:t>•  7. Evaluation plan</a:t>
+              <a:t>•  7. Evaluation methodology &amp; preliminary results</a:t>
             </a:r>
           </a:p>
           <a:p>
@@ -7692,7 +7794,7 @@
                 </a:solidFill>
                 <a:latin typeface="Calibri"/>
               </a:rPr>
-              <a:t>•  8. Expected results &amp; deliverables</a:t>
+              <a:t>•  8. Results &amp; deliverables</a:t>
             </a:r>
           </a:p>
         </p:txBody>
@@ -8802,7 +8904,7 @@
                 </a:solidFill>
                 <a:latin typeface="Calibri"/>
               </a:rPr>
-              <a:t>•  Integrate speech-to-text (PhoWhisper, local Whisper fallback) so users can ask by voice in Vietnamese.</a:t>
+              <a:t>•  Integrate speech-to-text (PhoWhisper, local PhoWhisper-small fallback) so users can ask by voice in Vietnamese.</a:t>
             </a:r>
           </a:p>
           <a:p>
@@ -10009,7 +10111,7 @@
                 </a:solidFill>
                 <a:latin typeface="Calibri"/>
               </a:rPr>
-              <a:t>•  ASR: PhoWhisper (VinAI, 17–24% relative WER reduction over multilingual Whisper on Vietnamese) as primary, local Whisper-small as offline fallback.</a:t>
+              <a:t>•  ASR: PhoWhisper (VinAI, 17–24% relative WER reduction over multilingual Whisper on Vietnamese) as primary, local PhoWhisper-small as offline fallback.</a:t>
             </a:r>
           </a:p>
         </p:txBody>
@@ -10296,7 +10398,7 @@
                 </a:solidFill>
                 <a:latin typeface="Calibri"/>
               </a:rPr>
-              <a:t>•  Sent to clone-voice-station → transcribed by PhoWhisper (Whisper fallback).</a:t>
+              <a:t>•  Sent to clone-voice-station → transcribed by PhoWhisper-large on Colab (PhoWhisper-small local fallback).</a:t>
             </a:r>
           </a:p>
           <a:p>
@@ -11459,7 +11561,7 @@
                             <a:srgbClr val="212121"/>
                           </a:solidFill>
                         </a:rPr>
-                        <a:t>PhoWhisper-large (Colab, primary) / Whisper-small (local fallback)</a:t>
+                        <a:t>PhoWhisper-large (Colab, primary) / PhoWhisper-small (local fallback)</a:t>
                       </a:r>
                     </a:p>
                   </a:txBody>
